--- a/Meta_presentation.pptx
+++ b/Meta_presentation.pptx
@@ -29,9 +29,9 @@
     <p:sldId id="340" r:id="rId20"/>
     <p:sldId id="325" r:id="rId21"/>
     <p:sldId id="326" r:id="rId22"/>
-    <p:sldId id="327" r:id="rId23"/>
-    <p:sldId id="328" r:id="rId24"/>
-    <p:sldId id="337" r:id="rId25"/>
+    <p:sldId id="341" r:id="rId23"/>
+    <p:sldId id="342" r:id="rId24"/>
+    <p:sldId id="343" r:id="rId25"/>
     <p:sldId id="330" r:id="rId26"/>
     <p:sldId id="336" r:id="rId27"/>
   </p:sldIdLst>
@@ -132,6 +132,11 @@
       </a:defRPr>
     </a:lvl9pPr>
   </p:defaultTextStyle>
+  <p:extLst>
+    <p:ext uri="{EFAFB233-063F-42B5-8137-9DF3F51BA10A}">
+      <p15:sldGuideLst xmlns:p15="http://schemas.microsoft.com/office/powerpoint/2012/main"/>
+    </p:ext>
+  </p:extLst>
 </p:presentation>
 </file>
 
@@ -217,7 +222,7 @@
           <a:p>
             <a:fld id="{0B78A9C2-C681-4D4F-9B59-C933ECD2ED15}" type="datetimeFigureOut">
               <a:rPr lang="fr-FR" smtClean="0"/>
-              <a:t>24/08/2026</a:t>
+              <a:t>28/08/2026</a:t>
             </a:fld>
             <a:endParaRPr lang="fr-FR"/>
           </a:p>
@@ -7275,7 +7280,7 @@
                   <a:srgbClr val="222222"/>
                 </a:solidFill>
               </a:rPr>
-              <a:t>Debounce: 3 consecutive samples to declare walking</a:t>
+              <a:t>Debounce: 5 consecutive samples to declare walking</a:t>
             </a:r>
           </a:p>
           <a:p>
@@ -11083,23 +11088,6 @@
                   <a:srgbClr val="222222"/>
                 </a:solidFill>
               </a:rPr>
-              <a:t>Addressed by SHA1 of the sentence: editing one phrase invalidates only its file</a:t>
-            </a:r>
-          </a:p>
-          <a:p>
-            <a:pPr marL="342900" indent="-342900">
-              <a:spcAft>
-                <a:spcPts val="1100"/>
-              </a:spcAft>
-              <a:buSzPct val="100000"/>
-              <a:buChar char="•"/>
-            </a:pPr>
-            <a:r>
-              <a:rPr lang="en-US" sz="1350" dirty="0">
-                <a:solidFill>
-                  <a:srgbClr val="222222"/>
-                </a:solidFill>
-              </a:rPr>
               <a:t>Idempotent script: a new language or phrase only generates what is missing</a:t>
             </a:r>
           </a:p>
@@ -11688,7 +11676,7 @@
                   <a:srgbClr val="222222"/>
                 </a:solidFill>
               </a:rPr>
-              <a:t>Phone hotspot is the reference setup; campus Wi-Fi loses DDS samples and delivers almost no frames</a:t>
+              <a:t>Phone hotspot is the reference setup </a:t>
             </a:r>
           </a:p>
         </p:txBody>
@@ -11821,7 +11809,7 @@
                   <a:srgbClr val="222222"/>
                 </a:solidFill>
               </a:rPr>
-              <a:t>Ctrl+C unsubscribes the Aria client then stops the stream - the C++ crash on exit is gone</a:t>
+              <a:t>Ctrl+C unsubscribes the Aria client then stops the stream</a:t>
             </a:r>
           </a:p>
         </p:txBody>
@@ -15875,6 +15863,7 @@
                 <a:spcPts val="800"/>
               </a:spcAft>
               <a:buSzPct val="100000"/>
+              <a:buFontTx/>
               <a:buChar char="•"/>
             </a:pPr>
             <a:r>
@@ -15883,7 +15872,7 @@
                   <a:srgbClr val="222222"/>
                 </a:solidFill>
               </a:rPr>
-              <a:t>Hardware-agnostic roadmap: Aria today, visitor's phone next</a:t>
+              <a:t>Hardware-agnostic: Aria + laptop today, Ray-Ban Meta + phone tomorrow</a:t>
             </a:r>
           </a:p>
         </p:txBody>
@@ -16005,7 +15994,7 @@
     </p:spTree>
     <p:extLst>
       <p:ext uri="{BB962C8B-B14F-4D97-AF65-F5344CB8AC3E}">
-        <p14:creationId xmlns:p14="http://schemas.microsoft.com/office/powerpoint/2010/main" val="174641838"/>
+        <p14:creationId xmlns:p14="http://schemas.microsoft.com/office/powerpoint/2010/main" val="4121246696"/>
       </p:ext>
     </p:extLst>
   </p:cSld>
@@ -16119,8 +16108,8 @@
         </p:nvSpPr>
         <p:spPr>
           <a:xfrm>
-            <a:off x="914400" y="1554480"/>
-            <a:ext cx="10332720" cy="1024128"/>
+            <a:off x="914400" y="1600200"/>
+            <a:ext cx="10337800" cy="1346200"/>
           </a:xfrm>
           <a:prstGeom prst="roundRect">
             <a:avLst>
@@ -16153,8 +16142,8 @@
         </p:nvSpPr>
         <p:spPr>
           <a:xfrm>
-            <a:off x="914400" y="1554480"/>
-            <a:ext cx="91440" cy="1024128"/>
+            <a:off x="914400" y="1600200"/>
+            <a:ext cx="88900" cy="1346200"/>
           </a:xfrm>
           <a:prstGeom prst="rect">
             <a:avLst/>
@@ -16180,24 +16169,24 @@
         </p:nvSpPr>
         <p:spPr>
           <a:xfrm>
-            <a:off x="1188720" y="1664208"/>
-            <a:ext cx="3291840" cy="822960"/>
-          </a:xfrm>
-          <a:prstGeom prst="rect">
-            <a:avLst/>
-          </a:prstGeom>
-          <a:noFill/>
-          <a:ln/>
-        </p:spPr>
-        <p:txBody>
-          <a:bodyPr wrap="square" rtlCol="0" anchor="ctr"/>
+            <a:off x="1193800" y="1600200"/>
+            <a:ext cx="3048000" cy="1346200"/>
+          </a:xfrm>
+          <a:prstGeom prst="rect">
+            <a:avLst/>
+          </a:prstGeom>
+          <a:noFill/>
+          <a:ln/>
+        </p:spPr>
+        <p:txBody>
+          <a:bodyPr wrap="square" rtlCol="0" anchor="ctr" anchorCtr="0"/>
           <a:lstStyle/>
           <a:p>
             <a:pPr marL="0" indent="0">
               <a:buNone/>
             </a:pPr>
             <a:r>
-              <a:rPr lang="en-US" sz="1500" b="1" dirty="0">
+              <a:rPr lang="en-US" sz="1650" b="1" dirty="0">
                 <a:solidFill>
                   <a:srgbClr val="002060"/>
                 </a:solidFill>
@@ -16215,24 +16204,24 @@
         </p:nvSpPr>
         <p:spPr>
           <a:xfrm>
-            <a:off x="4572000" y="1645920"/>
-            <a:ext cx="6492240" cy="841248"/>
-          </a:xfrm>
-          <a:prstGeom prst="rect">
-            <a:avLst/>
-          </a:prstGeom>
-          <a:noFill/>
-          <a:ln/>
-        </p:spPr>
-        <p:txBody>
-          <a:bodyPr wrap="square" rtlCol="0" anchor="ctr"/>
+            <a:off x="4394200" y="1600200"/>
+            <a:ext cx="6705600" cy="1346200"/>
+          </a:xfrm>
+          <a:prstGeom prst="rect">
+            <a:avLst/>
+          </a:prstGeom>
+          <a:noFill/>
+          <a:ln/>
+        </p:spPr>
+        <p:txBody>
+          <a:bodyPr wrap="square" rtlCol="0" anchor="ctr" anchorCtr="0"/>
           <a:lstStyle/>
           <a:p>
             <a:pPr marL="0" indent="0">
               <a:buNone/>
             </a:pPr>
             <a:r>
-              <a:rPr lang="en-US" sz="1250" dirty="0">
+              <a:rPr lang="en-US" sz="1400" dirty="0">
                 <a:solidFill>
                   <a:srgbClr val="222222"/>
                 </a:solidFill>
@@ -16245,7 +16234,7 @@
               <a:buNone/>
             </a:pPr>
             <a:r>
-              <a:rPr lang="en-US" sz="1250" i="1" dirty="0">
+              <a:rPr lang="en-US" sz="1400" i="1" dirty="0">
                 <a:solidFill>
                   <a:srgbClr val="0E7490"/>
                 </a:solidFill>
@@ -16263,8 +16252,8 @@
         </p:nvSpPr>
         <p:spPr>
           <a:xfrm>
-            <a:off x="914400" y="2724912"/>
-            <a:ext cx="10332720" cy="1024128"/>
+            <a:off x="914400" y="3276600"/>
+            <a:ext cx="10337800" cy="1346200"/>
           </a:xfrm>
           <a:prstGeom prst="roundRect">
             <a:avLst>
@@ -16297,8 +16286,8 @@
         </p:nvSpPr>
         <p:spPr>
           <a:xfrm>
-            <a:off x="914400" y="2724912"/>
-            <a:ext cx="91440" cy="1024128"/>
+            <a:off x="914400" y="3276600"/>
+            <a:ext cx="88900" cy="1346200"/>
           </a:xfrm>
           <a:prstGeom prst="rect">
             <a:avLst/>
@@ -16324,24 +16313,24 @@
         </p:nvSpPr>
         <p:spPr>
           <a:xfrm>
-            <a:off x="1188720" y="2834640"/>
-            <a:ext cx="3291840" cy="822960"/>
-          </a:xfrm>
-          <a:prstGeom prst="rect">
-            <a:avLst/>
-          </a:prstGeom>
-          <a:noFill/>
-          <a:ln/>
-        </p:spPr>
-        <p:txBody>
-          <a:bodyPr wrap="square" rtlCol="0" anchor="ctr"/>
+            <a:off x="1193800" y="3276600"/>
+            <a:ext cx="3048000" cy="1346200"/>
+          </a:xfrm>
+          <a:prstGeom prst="rect">
+            <a:avLst/>
+          </a:prstGeom>
+          <a:noFill/>
+          <a:ln/>
+        </p:spPr>
+        <p:txBody>
+          <a:bodyPr wrap="square" rtlCol="0" anchor="ctr" anchorCtr="0"/>
           <a:lstStyle/>
           <a:p>
             <a:pPr marL="0" indent="0">
               <a:buNone/>
             </a:pPr>
             <a:r>
-              <a:rPr lang="en-US" sz="1500" b="1" dirty="0">
+              <a:rPr lang="en-US" sz="1650" b="1" dirty="0">
                 <a:solidFill>
                   <a:srgbClr val="002060"/>
                 </a:solidFill>
@@ -16359,24 +16348,24 @@
         </p:nvSpPr>
         <p:spPr>
           <a:xfrm>
-            <a:off x="4572000" y="2816352"/>
-            <a:ext cx="6492240" cy="841248"/>
-          </a:xfrm>
-          <a:prstGeom prst="rect">
-            <a:avLst/>
-          </a:prstGeom>
-          <a:noFill/>
-          <a:ln/>
-        </p:spPr>
-        <p:txBody>
-          <a:bodyPr wrap="square" rtlCol="0" anchor="ctr"/>
+            <a:off x="4394200" y="3276600"/>
+            <a:ext cx="6705600" cy="1346200"/>
+          </a:xfrm>
+          <a:prstGeom prst="rect">
+            <a:avLst/>
+          </a:prstGeom>
+          <a:noFill/>
+          <a:ln/>
+        </p:spPr>
+        <p:txBody>
+          <a:bodyPr wrap="square" rtlCol="0" anchor="ctr" anchorCtr="0"/>
           <a:lstStyle/>
           <a:p>
             <a:pPr marL="0" indent="0">
               <a:buNone/>
             </a:pPr>
             <a:r>
-              <a:rPr lang="en-US" sz="1250" dirty="0">
+              <a:rPr lang="en-US" sz="1400" dirty="0">
                 <a:solidFill>
                   <a:srgbClr val="222222"/>
                 </a:solidFill>
@@ -16389,7 +16378,7 @@
               <a:buNone/>
             </a:pPr>
             <a:r>
-              <a:rPr lang="en-US" sz="1250" i="1" dirty="0">
+              <a:rPr lang="en-US" sz="1400" i="1" dirty="0">
                 <a:solidFill>
                   <a:srgbClr val="0E7490"/>
                 </a:solidFill>
@@ -16407,8 +16396,8 @@
         </p:nvSpPr>
         <p:spPr>
           <a:xfrm>
-            <a:off x="914400" y="3895344"/>
-            <a:ext cx="10332720" cy="1024128"/>
+            <a:off x="914400" y="4953000"/>
+            <a:ext cx="10337800" cy="1346200"/>
           </a:xfrm>
           <a:prstGeom prst="roundRect">
             <a:avLst>
@@ -16441,8 +16430,8 @@
         </p:nvSpPr>
         <p:spPr>
           <a:xfrm>
-            <a:off x="914400" y="3895344"/>
-            <a:ext cx="91440" cy="1024128"/>
+            <a:off x="914400" y="4953000"/>
+            <a:ext cx="88900" cy="1346200"/>
           </a:xfrm>
           <a:prstGeom prst="rect">
             <a:avLst/>
@@ -16468,24 +16457,24 @@
         </p:nvSpPr>
         <p:spPr>
           <a:xfrm>
-            <a:off x="1188720" y="4005072"/>
-            <a:ext cx="3291840" cy="822960"/>
-          </a:xfrm>
-          <a:prstGeom prst="rect">
-            <a:avLst/>
-          </a:prstGeom>
-          <a:noFill/>
-          <a:ln/>
-        </p:spPr>
-        <p:txBody>
-          <a:bodyPr wrap="square" rtlCol="0" anchor="ctr"/>
+            <a:off x="1193800" y="4953000"/>
+            <a:ext cx="3048000" cy="1346200"/>
+          </a:xfrm>
+          <a:prstGeom prst="rect">
+            <a:avLst/>
+          </a:prstGeom>
+          <a:noFill/>
+          <a:ln/>
+        </p:spPr>
+        <p:txBody>
+          <a:bodyPr wrap="square" rtlCol="0" anchor="ctr" anchorCtr="0"/>
           <a:lstStyle/>
           <a:p>
             <a:pPr marL="0" indent="0">
               <a:buNone/>
             </a:pPr>
             <a:r>
-              <a:rPr lang="en-US" sz="1500" b="1" dirty="0">
+              <a:rPr lang="en-US" sz="1650" b="1" dirty="0">
                 <a:solidFill>
                   <a:srgbClr val="002060"/>
                 </a:solidFill>
@@ -16503,24 +16492,24 @@
         </p:nvSpPr>
         <p:spPr>
           <a:xfrm>
-            <a:off x="4572000" y="3986784"/>
-            <a:ext cx="6492240" cy="841248"/>
-          </a:xfrm>
-          <a:prstGeom prst="rect">
-            <a:avLst/>
-          </a:prstGeom>
-          <a:noFill/>
-          <a:ln/>
-        </p:spPr>
-        <p:txBody>
-          <a:bodyPr wrap="square" rtlCol="0" anchor="ctr"/>
+            <a:off x="4394200" y="4953000"/>
+            <a:ext cx="6705600" cy="1346200"/>
+          </a:xfrm>
+          <a:prstGeom prst="rect">
+            <a:avLst/>
+          </a:prstGeom>
+          <a:noFill/>
+          <a:ln/>
+        </p:spPr>
+        <p:txBody>
+          <a:bodyPr wrap="square" rtlCol="0" anchor="ctr" anchorCtr="0"/>
           <a:lstStyle/>
           <a:p>
             <a:pPr marL="0" indent="0">
               <a:buNone/>
             </a:pPr>
             <a:r>
-              <a:rPr lang="en-US" sz="1250" dirty="0">
+              <a:rPr lang="en-US" sz="1400" dirty="0">
                 <a:solidFill>
                   <a:srgbClr val="222222"/>
                 </a:solidFill>
@@ -16533,156 +16522,12 @@
               <a:buNone/>
             </a:pPr>
             <a:r>
-              <a:rPr lang="en-US" sz="1250" i="1" dirty="0">
+              <a:rPr lang="en-US" sz="1400" i="1" dirty="0">
                 <a:solidFill>
                   <a:srgbClr val="0E7490"/>
                 </a:solidFill>
               </a:rPr>
               <a:t>Cached opener and sentence streaming hide most of it; a local model remains untested</a:t>
-            </a:r>
-          </a:p>
-        </p:txBody>
-      </p:sp>
-      <p:sp>
-        <p:nvSpPr>
-          <p:cNvPr id="17" name="Shape 14"/>
-          <p:cNvSpPr/>
-          <p:nvPr/>
-        </p:nvSpPr>
-        <p:spPr>
-          <a:xfrm>
-            <a:off x="914400" y="5065776"/>
-            <a:ext cx="10332720" cy="1024128"/>
-          </a:xfrm>
-          <a:prstGeom prst="roundRect">
-            <a:avLst>
-              <a:gd name="adj" fmla="val 5357"/>
-            </a:avLst>
-          </a:prstGeom>
-          <a:solidFill>
-            <a:srgbClr val="EEF3F8"/>
-          </a:solidFill>
-          <a:ln w="12700">
-            <a:solidFill>
-              <a:srgbClr val="D7DEE8"/>
-            </a:solidFill>
-            <a:prstDash val="solid"/>
-          </a:ln>
-        </p:spPr>
-        <p:txBody>
-          <a:bodyPr/>
-          <a:lstStyle/>
-          <a:p>
-            <a:endParaRPr lang="fr-FR"/>
-          </a:p>
-        </p:txBody>
-      </p:sp>
-      <p:sp>
-        <p:nvSpPr>
-          <p:cNvPr id="18" name="Shape 15"/>
-          <p:cNvSpPr/>
-          <p:nvPr/>
-        </p:nvSpPr>
-        <p:spPr>
-          <a:xfrm>
-            <a:off x="914400" y="5065776"/>
-            <a:ext cx="91440" cy="1024128"/>
-          </a:xfrm>
-          <a:prstGeom prst="rect">
-            <a:avLst/>
-          </a:prstGeom>
-          <a:solidFill>
-            <a:srgbClr val="C2671A"/>
-          </a:solidFill>
-          <a:ln/>
-        </p:spPr>
-        <p:txBody>
-          <a:bodyPr/>
-          <a:lstStyle/>
-          <a:p>
-            <a:endParaRPr lang="fr-FR"/>
-          </a:p>
-        </p:txBody>
-      </p:sp>
-      <p:sp>
-        <p:nvSpPr>
-          <p:cNvPr id="19" name="Text 16"/>
-          <p:cNvSpPr/>
-          <p:nvPr/>
-        </p:nvSpPr>
-        <p:spPr>
-          <a:xfrm>
-            <a:off x="1188720" y="5175504"/>
-            <a:ext cx="3291840" cy="822960"/>
-          </a:xfrm>
-          <a:prstGeom prst="rect">
-            <a:avLst/>
-          </a:prstGeom>
-          <a:noFill/>
-          <a:ln/>
-        </p:spPr>
-        <p:txBody>
-          <a:bodyPr wrap="square" rtlCol="0" anchor="ctr"/>
-          <a:lstStyle/>
-          <a:p>
-            <a:pPr marL="0" indent="0">
-              <a:buNone/>
-            </a:pPr>
-            <a:r>
-              <a:rPr lang="en-US" sz="1500" b="1" dirty="0">
-                <a:solidFill>
-                  <a:srgbClr val="002060"/>
-                </a:solidFill>
-              </a:rPr>
-              <a:t>Network and two-step launch</a:t>
-            </a:r>
-          </a:p>
-        </p:txBody>
-      </p:sp>
-      <p:sp>
-        <p:nvSpPr>
-          <p:cNvPr id="20" name="Text 17"/>
-          <p:cNvSpPr/>
-          <p:nvPr/>
-        </p:nvSpPr>
-        <p:spPr>
-          <a:xfrm>
-            <a:off x="4572000" y="5157216"/>
-            <a:ext cx="6492240" cy="841248"/>
-          </a:xfrm>
-          <a:prstGeom prst="rect">
-            <a:avLst/>
-          </a:prstGeom>
-          <a:noFill/>
-          <a:ln/>
-        </p:spPr>
-        <p:txBody>
-          <a:bodyPr wrap="square" rtlCol="0" anchor="ctr"/>
-          <a:lstStyle/>
-          <a:p>
-            <a:pPr marL="0" indent="0">
-              <a:buNone/>
-            </a:pPr>
-            <a:r>
-              <a:rPr lang="en-US" sz="1250" dirty="0">
-                <a:solidFill>
-                  <a:srgbClr val="222222"/>
-                </a:solidFill>
-              </a:rPr>
-              <a:t>Streaming was only stable on a phone hotspot; institutional Wi-Fi drops samples massively</a:t>
-            </a:r>
-          </a:p>
-          <a:p>
-            <a:pPr marL="0" indent="0">
-              <a:buNone/>
-            </a:pPr>
-            <a:r>
-              <a:rPr lang="en-US" sz="1250" i="1" dirty="0">
-                <a:solidFill>
-                  <a:srgbClr val="0E7490"/>
-                </a:solidFill>
-              </a:rPr>
-              <a:t>Meta's official streamer must also be started by run.sh before our pipeline connects</a:t>
             </a:r>
           </a:p>
         </p:txBody>
@@ -16720,7 +16565,7 @@
     </p:spTree>
     <p:extLst>
       <p:ext uri="{BB962C8B-B14F-4D97-AF65-F5344CB8AC3E}">
-        <p14:creationId xmlns:p14="http://schemas.microsoft.com/office/powerpoint/2010/main" val="1933754847"/>
+        <p14:creationId xmlns:p14="http://schemas.microsoft.com/office/powerpoint/2010/main" val="3249022379"/>
       </p:ext>
     </p:extLst>
   </p:cSld>
@@ -16820,14 +16665,14 @@
       </p:sp>
       <p:sp>
         <p:nvSpPr>
-          <p:cNvPr id="5" name="Shape 2"/>
-          <p:cNvSpPr/>
-          <p:nvPr/>
-        </p:nvSpPr>
-        <p:spPr>
-          <a:xfrm>
-            <a:off x="1097280" y="1460500"/>
-            <a:ext cx="502920" cy="502920"/>
+          <p:cNvPr id="8" name="Shape 5"/>
+          <p:cNvSpPr/>
+          <p:nvPr/>
+        </p:nvSpPr>
+        <p:spPr>
+          <a:xfrm>
+            <a:off x="1092200" y="1574800"/>
+            <a:ext cx="508000" cy="508000"/>
           </a:xfrm>
           <a:prstGeom prst="roundRect">
             <a:avLst>
@@ -16849,14 +16694,14 @@
       </p:sp>
       <p:sp>
         <p:nvSpPr>
-          <p:cNvPr id="6" name="Text 3"/>
-          <p:cNvSpPr/>
-          <p:nvPr/>
-        </p:nvSpPr>
-        <p:spPr>
-          <a:xfrm>
-            <a:off x="1097280" y="1460500"/>
-            <a:ext cx="502920" cy="502920"/>
+          <p:cNvPr id="9" name="Text 6"/>
+          <p:cNvSpPr/>
+          <p:nvPr/>
+        </p:nvSpPr>
+        <p:spPr>
+          <a:xfrm>
+            <a:off x="1092200" y="1574800"/>
+            <a:ext cx="508000" cy="508000"/>
           </a:xfrm>
           <a:prstGeom prst="rect">
             <a:avLst/>
@@ -16885,14 +16730,14 @@
       </p:sp>
       <p:sp>
         <p:nvSpPr>
-          <p:cNvPr id="7" name="Text 4"/>
-          <p:cNvSpPr/>
-          <p:nvPr/>
-        </p:nvSpPr>
-        <p:spPr>
-          <a:xfrm>
-            <a:off x="1783080" y="1460500"/>
-            <a:ext cx="9418320" cy="640080"/>
+          <p:cNvPr id="10" name="Text 7"/>
+          <p:cNvSpPr/>
+          <p:nvPr/>
+        </p:nvSpPr>
+        <p:spPr>
+          <a:xfrm>
+            <a:off x="1778000" y="1574800"/>
+            <a:ext cx="9093200" cy="635000"/>
           </a:xfrm>
           <a:prstGeom prst="rect">
             <a:avLst/>
@@ -16910,7 +16755,7 @@
                   <a:srgbClr val="002060"/>
                 </a:solidFill>
               </a:rPr>
-              <a:t>Image-based re-recognition  </a:t>
+              <a:t>Catalogs at exhibition scale  </a:t>
             </a:r>
             <a:r>
               <a:rPr lang="en-US" sz="1300" dirty="0">
@@ -16918,21 +16763,21 @@
                   <a:srgbClr val="222222"/>
                 </a:solidFill>
               </a:rPr>
-              <a:t>Compare visual embeddings or local features between the current frame and a reference frame saved at first recognition, instead of matching titles by name</a:t>
-            </a:r>
-          </a:p>
-        </p:txBody>
-      </p:sp>
-      <p:sp>
-        <p:nvSpPr>
-          <p:cNvPr id="8" name="Shape 5"/>
-          <p:cNvSpPr/>
-          <p:nvPr/>
-        </p:nvSpPr>
-        <p:spPr>
-          <a:xfrm>
-            <a:off x="1097280" y="2463800"/>
-            <a:ext cx="502920" cy="502920"/>
+              <a:t>Extend catalogs to a whole exhibition and study their effect on latency; define a working procedure with curatorial teams for full checklists, or photograph the wall labels and convert them</a:t>
+            </a:r>
+          </a:p>
+        </p:txBody>
+      </p:sp>
+      <p:sp>
+        <p:nvSpPr>
+          <p:cNvPr id="11" name="Shape 8"/>
+          <p:cNvSpPr/>
+          <p:nvPr/>
+        </p:nvSpPr>
+        <p:spPr>
+          <a:xfrm>
+            <a:off x="1092200" y="2870200"/>
+            <a:ext cx="508000" cy="508000"/>
           </a:xfrm>
           <a:prstGeom prst="roundRect">
             <a:avLst>
@@ -16954,14 +16799,14 @@
       </p:sp>
       <p:sp>
         <p:nvSpPr>
-          <p:cNvPr id="9" name="Text 6"/>
-          <p:cNvSpPr/>
-          <p:nvPr/>
-        </p:nvSpPr>
-        <p:spPr>
-          <a:xfrm>
-            <a:off x="1097280" y="2463800"/>
-            <a:ext cx="502920" cy="502920"/>
+          <p:cNvPr id="12" name="Text 9"/>
+          <p:cNvSpPr/>
+          <p:nvPr/>
+        </p:nvSpPr>
+        <p:spPr>
+          <a:xfrm>
+            <a:off x="1092200" y="2870200"/>
+            <a:ext cx="508000" cy="508000"/>
           </a:xfrm>
           <a:prstGeom prst="rect">
             <a:avLst/>
@@ -16990,14 +16835,14 @@
       </p:sp>
       <p:sp>
         <p:nvSpPr>
-          <p:cNvPr id="10" name="Text 7"/>
-          <p:cNvSpPr/>
-          <p:nvPr/>
-        </p:nvSpPr>
-        <p:spPr>
-          <a:xfrm>
-            <a:off x="1783080" y="2463800"/>
-            <a:ext cx="9418320" cy="640080"/>
+          <p:cNvPr id="13" name="Text 10"/>
+          <p:cNvSpPr/>
+          <p:nvPr/>
+        </p:nvSpPr>
+        <p:spPr>
+          <a:xfrm>
+            <a:off x="1778000" y="2870200"/>
+            <a:ext cx="9093200" cy="635000"/>
           </a:xfrm>
           <a:prstGeom prst="rect">
             <a:avLst/>
@@ -17015,7 +16860,7 @@
                   <a:srgbClr val="002060"/>
                 </a:solidFill>
               </a:rPr>
-              <a:t>Catalogs at exhibition scale  </a:t>
+              <a:t>Streaming speech synthesis  </a:t>
             </a:r>
             <a:r>
               <a:rPr lang="en-US" sz="1300" dirty="0">
@@ -17023,21 +16868,21 @@
                   <a:srgbClr val="222222"/>
                 </a:solidFill>
               </a:rPr>
-              <a:t>Extend catalogs to a whole exhibition and study their effect on latency; define a working procedure with curatorial teams for full checklists, or photograph the wall labels and convert them</a:t>
-            </a:r>
-          </a:p>
-        </p:txBody>
-      </p:sp>
-      <p:sp>
-        <p:nvSpPr>
-          <p:cNvPr id="11" name="Shape 8"/>
-          <p:cNvSpPr/>
-          <p:nvPr/>
-        </p:nvSpPr>
-        <p:spPr>
-          <a:xfrm>
-            <a:off x="1097280" y="3467100"/>
-            <a:ext cx="502920" cy="502920"/>
+              <a:t>Begin speaking a sentence before its synthesis completes, offsetting the extra latency of the advanced TTS engine</a:t>
+            </a:r>
+          </a:p>
+        </p:txBody>
+      </p:sp>
+      <p:sp>
+        <p:nvSpPr>
+          <p:cNvPr id="14" name="Shape 11"/>
+          <p:cNvSpPr/>
+          <p:nvPr/>
+        </p:nvSpPr>
+        <p:spPr>
+          <a:xfrm>
+            <a:off x="1092200" y="4165600"/>
+            <a:ext cx="508000" cy="508000"/>
           </a:xfrm>
           <a:prstGeom prst="roundRect">
             <a:avLst>
@@ -17059,14 +16904,14 @@
       </p:sp>
       <p:sp>
         <p:nvSpPr>
-          <p:cNvPr id="12" name="Text 9"/>
-          <p:cNvSpPr/>
-          <p:nvPr/>
-        </p:nvSpPr>
-        <p:spPr>
-          <a:xfrm>
-            <a:off x="1097280" y="3467100"/>
-            <a:ext cx="502920" cy="502920"/>
+          <p:cNvPr id="15" name="Text 12"/>
+          <p:cNvSpPr/>
+          <p:nvPr/>
+        </p:nvSpPr>
+        <p:spPr>
+          <a:xfrm>
+            <a:off x="1092200" y="4165600"/>
+            <a:ext cx="508000" cy="508000"/>
           </a:xfrm>
           <a:prstGeom prst="rect">
             <a:avLst/>
@@ -17095,14 +16940,14 @@
       </p:sp>
       <p:sp>
         <p:nvSpPr>
-          <p:cNvPr id="13" name="Text 10"/>
-          <p:cNvSpPr/>
-          <p:nvPr/>
-        </p:nvSpPr>
-        <p:spPr>
-          <a:xfrm>
-            <a:off x="1783080" y="3467100"/>
-            <a:ext cx="9418320" cy="640080"/>
+          <p:cNvPr id="16" name="Text 13"/>
+          <p:cNvSpPr/>
+          <p:nvPr/>
+        </p:nvSpPr>
+        <p:spPr>
+          <a:xfrm>
+            <a:off x="1778000" y="4165600"/>
+            <a:ext cx="9093200" cy="635000"/>
           </a:xfrm>
           <a:prstGeom prst="rect">
             <a:avLst/>
@@ -17120,7 +16965,7 @@
                   <a:srgbClr val="002060"/>
                 </a:solidFill>
               </a:rPr>
-              <a:t>Streaming speech synthesis  </a:t>
+              <a:t>Local model on the device  </a:t>
             </a:r>
             <a:r>
               <a:rPr lang="en-US" sz="1300" dirty="0">
@@ -17128,21 +16973,21 @@
                   <a:srgbClr val="222222"/>
                 </a:solidFill>
               </a:rPr>
-              <a:t>Begin speaking a sentence before its synthesis completes, offsetting the extra latency of the advanced TTS engine</a:t>
-            </a:r>
-          </a:p>
-        </p:txBody>
-      </p:sp>
-      <p:sp>
-        <p:nvSpPr>
-          <p:cNvPr id="14" name="Shape 11"/>
-          <p:cNvSpPr/>
-          <p:nvPr/>
-        </p:nvSpPr>
-        <p:spPr>
-          <a:xfrm>
-            <a:off x="1097280" y="4470400"/>
-            <a:ext cx="502920" cy="502920"/>
+              <a:t>Study running a local model on the device to reduce the dependency on the network and on an external service</a:t>
+            </a:r>
+          </a:p>
+        </p:txBody>
+      </p:sp>
+      <p:sp>
+        <p:nvSpPr>
+          <p:cNvPr id="17" name="Shape 14"/>
+          <p:cNvSpPr/>
+          <p:nvPr/>
+        </p:nvSpPr>
+        <p:spPr>
+          <a:xfrm>
+            <a:off x="1092200" y="5461000"/>
+            <a:ext cx="508000" cy="508000"/>
           </a:xfrm>
           <a:prstGeom prst="roundRect">
             <a:avLst>
@@ -17164,14 +17009,14 @@
       </p:sp>
       <p:sp>
         <p:nvSpPr>
-          <p:cNvPr id="15" name="Text 12"/>
-          <p:cNvSpPr/>
-          <p:nvPr/>
-        </p:nvSpPr>
-        <p:spPr>
-          <a:xfrm>
-            <a:off x="1097280" y="4470400"/>
-            <a:ext cx="502920" cy="502920"/>
+          <p:cNvPr id="18" name="Text 15"/>
+          <p:cNvSpPr/>
+          <p:nvPr/>
+        </p:nvSpPr>
+        <p:spPr>
+          <a:xfrm>
+            <a:off x="1092200" y="5461000"/>
+            <a:ext cx="508000" cy="508000"/>
           </a:xfrm>
           <a:prstGeom prst="rect">
             <a:avLst/>
@@ -17200,119 +17045,14 @@
       </p:sp>
       <p:sp>
         <p:nvSpPr>
-          <p:cNvPr id="16" name="Text 13"/>
-          <p:cNvSpPr/>
-          <p:nvPr/>
-        </p:nvSpPr>
-        <p:spPr>
-          <a:xfrm>
-            <a:off x="1783080" y="4470400"/>
-            <a:ext cx="9418320" cy="640080"/>
-          </a:xfrm>
-          <a:prstGeom prst="rect">
-            <a:avLst/>
-          </a:prstGeom>
-          <a:noFill/>
-          <a:ln/>
-        </p:spPr>
-        <p:txBody>
-          <a:bodyPr wrap="square" rtlCol="0" anchor="ctr"/>
-          <a:lstStyle/>
-          <a:p>
-            <a:r>
-              <a:rPr lang="en-US" sz="1500" b="1" dirty="0">
-                <a:solidFill>
-                  <a:srgbClr val="002060"/>
-                </a:solidFill>
-              </a:rPr>
-              <a:t>Local model on the device  </a:t>
-            </a:r>
-            <a:r>
-              <a:rPr lang="en-US" sz="1300" dirty="0">
-                <a:solidFill>
-                  <a:srgbClr val="222222"/>
-                </a:solidFill>
-              </a:rPr>
-              <a:t>Study running a local model on the device to reduce the dependency on the network and on an external service</a:t>
-            </a:r>
-          </a:p>
-        </p:txBody>
-      </p:sp>
-      <p:sp>
-        <p:nvSpPr>
-          <p:cNvPr id="17" name="Shape 14"/>
-          <p:cNvSpPr/>
-          <p:nvPr/>
-        </p:nvSpPr>
-        <p:spPr>
-          <a:xfrm>
-            <a:off x="1097280" y="5473700"/>
-            <a:ext cx="502920" cy="502920"/>
-          </a:xfrm>
-          <a:prstGeom prst="roundRect">
-            <a:avLst>
-              <a:gd name="adj" fmla="val 18182"/>
-            </a:avLst>
-          </a:prstGeom>
-          <a:solidFill>
-            <a:srgbClr val="002060"/>
-          </a:solidFill>
-          <a:ln/>
-        </p:spPr>
-        <p:txBody>
-          <a:bodyPr/>
-          <a:lstStyle/>
-          <a:p>
-            <a:endParaRPr lang="fr-FR"/>
-          </a:p>
-        </p:txBody>
-      </p:sp>
-      <p:sp>
-        <p:nvSpPr>
-          <p:cNvPr id="18" name="Text 15"/>
-          <p:cNvSpPr/>
-          <p:nvPr/>
-        </p:nvSpPr>
-        <p:spPr>
-          <a:xfrm>
-            <a:off x="1097280" y="5473700"/>
-            <a:ext cx="502920" cy="502920"/>
-          </a:xfrm>
-          <a:prstGeom prst="rect">
-            <a:avLst/>
-          </a:prstGeom>
-          <a:noFill/>
-          <a:ln/>
-        </p:spPr>
-        <p:txBody>
-          <a:bodyPr wrap="square" rtlCol="0" anchor="ctr"/>
-          <a:lstStyle/>
-          <a:p>
-            <a:pPr marL="0" indent="0" algn="ctr">
-              <a:buNone/>
-            </a:pPr>
-            <a:r>
-              <a:rPr lang="en-US" sz="1600" b="1" dirty="0">
-                <a:solidFill>
-                  <a:srgbClr val="FFFFFF"/>
-                </a:solidFill>
-              </a:rPr>
-              <a:t>5</a:t>
-            </a:r>
-            <a:endParaRPr lang="en-US" sz="1600" dirty="0"/>
-          </a:p>
-        </p:txBody>
-      </p:sp>
-      <p:sp>
-        <p:nvSpPr>
           <p:cNvPr id="19" name="Text 16"/>
           <p:cNvSpPr/>
           <p:nvPr/>
         </p:nvSpPr>
         <p:spPr>
           <a:xfrm>
-            <a:off x="1783080" y="5473700"/>
-            <a:ext cx="9418320" cy="640080"/>
+            <a:off x="1778000" y="5461000"/>
+            <a:ext cx="9093200" cy="635000"/>
           </a:xfrm>
           <a:prstGeom prst="rect">
             <a:avLst/>
@@ -17376,7 +17116,7 @@
     </p:spTree>
     <p:extLst>
       <p:ext uri="{BB962C8B-B14F-4D97-AF65-F5344CB8AC3E}">
-        <p14:creationId xmlns:p14="http://schemas.microsoft.com/office/powerpoint/2010/main" val="1622082328"/>
+        <p14:creationId xmlns:p14="http://schemas.microsoft.com/office/powerpoint/2010/main" val="3749885309"/>
       </p:ext>
     </p:extLst>
   </p:cSld>
@@ -18497,13 +18237,58 @@
           <a:p>
             <a:pPr algn="l"/>
             <a:r>
-              <a:rPr lang="fr-FR" b="1">
+              <a:rPr lang="fr-FR" b="1" dirty="0">
                 <a:solidFill>
                   <a:srgbClr val="002060"/>
                 </a:solidFill>
               </a:rPr>
-              <a:t>Ben Kratzo  -  project supervisor</a:t>
-            </a:r>
+              <a:t>Ben </a:t>
+            </a:r>
+            <a:r>
+              <a:rPr lang="fr-FR" b="1" dirty="0" err="1">
+                <a:solidFill>
+                  <a:srgbClr val="002060"/>
+                </a:solidFill>
+              </a:rPr>
+              <a:t>Kretzu</a:t>
+            </a:r>
+            <a:r>
+              <a:rPr lang="fr-FR" b="1" dirty="0">
+                <a:solidFill>
+                  <a:srgbClr val="002060"/>
+                </a:solidFill>
+              </a:rPr>
+              <a:t>  -  </a:t>
+            </a:r>
+            <a:r>
+              <a:rPr lang="fr-FR" b="1" dirty="0" err="1">
+                <a:solidFill>
+                  <a:srgbClr val="002060"/>
+                </a:solidFill>
+              </a:rPr>
+              <a:t>project</a:t>
+            </a:r>
+            <a:r>
+              <a:rPr lang="fr-FR" b="1" dirty="0">
+                <a:solidFill>
+                  <a:srgbClr val="002060"/>
+                </a:solidFill>
+              </a:rPr>
+              <a:t> </a:t>
+            </a:r>
+            <a:r>
+              <a:rPr lang="fr-FR" b="1" dirty="0" err="1">
+                <a:solidFill>
+                  <a:srgbClr val="002060"/>
+                </a:solidFill>
+              </a:rPr>
+              <a:t>supervisor</a:t>
+            </a:r>
+            <a:endParaRPr lang="fr-FR" b="1" dirty="0">
+              <a:solidFill>
+                <a:srgbClr val="002060"/>
+              </a:solidFill>
+            </a:endParaRPr>
           </a:p>
         </p:txBody>
       </p:sp>
@@ -18537,12 +18322,252 @@
           <a:p>
             <a:pPr algn="l"/>
             <a:r>
-              <a:rPr lang="fr-FR" sz="1400">
+              <a:rPr lang="fr-FR" sz="1400" dirty="0">
                 <a:solidFill>
                   <a:srgbClr val="222222"/>
                 </a:solidFill>
               </a:rPr>
-              <a:t>For being available throughout the project, for listening carefully whenever we were stuck, and for advice that shaped the key design decisions of this system - from the motion-driven control signal to the closed-catalog approach.</a:t>
+              <a:t>For </a:t>
+            </a:r>
+            <a:r>
+              <a:rPr lang="fr-FR" sz="1400" dirty="0" err="1">
+                <a:solidFill>
+                  <a:srgbClr val="222222"/>
+                </a:solidFill>
+              </a:rPr>
+              <a:t>being</a:t>
+            </a:r>
+            <a:r>
+              <a:rPr lang="fr-FR" sz="1400" dirty="0">
+                <a:solidFill>
+                  <a:srgbClr val="222222"/>
+                </a:solidFill>
+              </a:rPr>
+              <a:t> </a:t>
+            </a:r>
+            <a:r>
+              <a:rPr lang="fr-FR" sz="1400" dirty="0" err="1">
+                <a:solidFill>
+                  <a:srgbClr val="222222"/>
+                </a:solidFill>
+              </a:rPr>
+              <a:t>available</a:t>
+            </a:r>
+            <a:r>
+              <a:rPr lang="fr-FR" sz="1400" dirty="0">
+                <a:solidFill>
+                  <a:srgbClr val="222222"/>
+                </a:solidFill>
+              </a:rPr>
+              <a:t> </a:t>
+            </a:r>
+            <a:r>
+              <a:rPr lang="fr-FR" sz="1400" dirty="0" err="1">
+                <a:solidFill>
+                  <a:srgbClr val="222222"/>
+                </a:solidFill>
+              </a:rPr>
+              <a:t>throughout</a:t>
+            </a:r>
+            <a:r>
+              <a:rPr lang="fr-FR" sz="1400" dirty="0">
+                <a:solidFill>
+                  <a:srgbClr val="222222"/>
+                </a:solidFill>
+              </a:rPr>
+              <a:t> the </a:t>
+            </a:r>
+            <a:r>
+              <a:rPr lang="fr-FR" sz="1400" dirty="0" err="1">
+                <a:solidFill>
+                  <a:srgbClr val="222222"/>
+                </a:solidFill>
+              </a:rPr>
+              <a:t>project</a:t>
+            </a:r>
+            <a:r>
+              <a:rPr lang="fr-FR" sz="1400" dirty="0">
+                <a:solidFill>
+                  <a:srgbClr val="222222"/>
+                </a:solidFill>
+              </a:rPr>
+              <a:t>, for </a:t>
+            </a:r>
+            <a:r>
+              <a:rPr lang="fr-FR" sz="1400" dirty="0" err="1">
+                <a:solidFill>
+                  <a:srgbClr val="222222"/>
+                </a:solidFill>
+              </a:rPr>
+              <a:t>listening</a:t>
+            </a:r>
+            <a:r>
+              <a:rPr lang="fr-FR" sz="1400" dirty="0">
+                <a:solidFill>
+                  <a:srgbClr val="222222"/>
+                </a:solidFill>
+              </a:rPr>
+              <a:t> </a:t>
+            </a:r>
+            <a:r>
+              <a:rPr lang="fr-FR" sz="1400" dirty="0" err="1">
+                <a:solidFill>
+                  <a:srgbClr val="222222"/>
+                </a:solidFill>
+              </a:rPr>
+              <a:t>carefully</a:t>
+            </a:r>
+            <a:r>
+              <a:rPr lang="fr-FR" sz="1400" dirty="0">
+                <a:solidFill>
+                  <a:srgbClr val="222222"/>
+                </a:solidFill>
+              </a:rPr>
+              <a:t> </a:t>
+            </a:r>
+            <a:r>
+              <a:rPr lang="fr-FR" sz="1400" dirty="0" err="1">
+                <a:solidFill>
+                  <a:srgbClr val="222222"/>
+                </a:solidFill>
+              </a:rPr>
+              <a:t>whenever</a:t>
+            </a:r>
+            <a:r>
+              <a:rPr lang="fr-FR" sz="1400" dirty="0">
+                <a:solidFill>
+                  <a:srgbClr val="222222"/>
+                </a:solidFill>
+              </a:rPr>
+              <a:t> </a:t>
+            </a:r>
+            <a:r>
+              <a:rPr lang="fr-FR" sz="1400" dirty="0" err="1">
+                <a:solidFill>
+                  <a:srgbClr val="222222"/>
+                </a:solidFill>
+              </a:rPr>
+              <a:t>we</a:t>
+            </a:r>
+            <a:r>
+              <a:rPr lang="fr-FR" sz="1400" dirty="0">
+                <a:solidFill>
+                  <a:srgbClr val="222222"/>
+                </a:solidFill>
+              </a:rPr>
+              <a:t> </a:t>
+            </a:r>
+            <a:r>
+              <a:rPr lang="fr-FR" sz="1400" dirty="0" err="1">
+                <a:solidFill>
+                  <a:srgbClr val="222222"/>
+                </a:solidFill>
+              </a:rPr>
+              <a:t>were</a:t>
+            </a:r>
+            <a:r>
+              <a:rPr lang="fr-FR" sz="1400" dirty="0">
+                <a:solidFill>
+                  <a:srgbClr val="222222"/>
+                </a:solidFill>
+              </a:rPr>
+              <a:t> </a:t>
+            </a:r>
+            <a:r>
+              <a:rPr lang="fr-FR" sz="1400" dirty="0" err="1">
+                <a:solidFill>
+                  <a:srgbClr val="222222"/>
+                </a:solidFill>
+              </a:rPr>
+              <a:t>stuck</a:t>
+            </a:r>
+            <a:r>
+              <a:rPr lang="fr-FR" sz="1400" dirty="0">
+                <a:solidFill>
+                  <a:srgbClr val="222222"/>
+                </a:solidFill>
+              </a:rPr>
+              <a:t>, and for </a:t>
+            </a:r>
+            <a:r>
+              <a:rPr lang="fr-FR" sz="1400" dirty="0" err="1">
+                <a:solidFill>
+                  <a:srgbClr val="222222"/>
+                </a:solidFill>
+              </a:rPr>
+              <a:t>advice</a:t>
+            </a:r>
+            <a:r>
+              <a:rPr lang="fr-FR" sz="1400" dirty="0">
+                <a:solidFill>
+                  <a:srgbClr val="222222"/>
+                </a:solidFill>
+              </a:rPr>
+              <a:t> </a:t>
+            </a:r>
+            <a:r>
+              <a:rPr lang="fr-FR" sz="1400" dirty="0" err="1">
+                <a:solidFill>
+                  <a:srgbClr val="222222"/>
+                </a:solidFill>
+              </a:rPr>
+              <a:t>that</a:t>
+            </a:r>
+            <a:r>
+              <a:rPr lang="fr-FR" sz="1400" dirty="0">
+                <a:solidFill>
+                  <a:srgbClr val="222222"/>
+                </a:solidFill>
+              </a:rPr>
+              <a:t> </a:t>
+            </a:r>
+            <a:r>
+              <a:rPr lang="fr-FR" sz="1400" dirty="0" err="1">
+                <a:solidFill>
+                  <a:srgbClr val="222222"/>
+                </a:solidFill>
+              </a:rPr>
+              <a:t>shaped</a:t>
+            </a:r>
+            <a:r>
+              <a:rPr lang="fr-FR" sz="1400" dirty="0">
+                <a:solidFill>
+                  <a:srgbClr val="222222"/>
+                </a:solidFill>
+              </a:rPr>
+              <a:t> the key design </a:t>
+            </a:r>
+            <a:r>
+              <a:rPr lang="fr-FR" sz="1400" dirty="0" err="1">
+                <a:solidFill>
+                  <a:srgbClr val="222222"/>
+                </a:solidFill>
+              </a:rPr>
+              <a:t>decisions</a:t>
+            </a:r>
+            <a:r>
+              <a:rPr lang="fr-FR" sz="1400" dirty="0">
+                <a:solidFill>
+                  <a:srgbClr val="222222"/>
+                </a:solidFill>
+              </a:rPr>
+              <a:t> of </a:t>
+            </a:r>
+            <a:r>
+              <a:rPr lang="fr-FR" sz="1400" dirty="0" err="1">
+                <a:solidFill>
+                  <a:srgbClr val="222222"/>
+                </a:solidFill>
+              </a:rPr>
+              <a:t>this</a:t>
+            </a:r>
+            <a:r>
+              <a:rPr lang="fr-FR" sz="1400" dirty="0">
+                <a:solidFill>
+                  <a:srgbClr val="222222"/>
+                </a:solidFill>
+              </a:rPr>
+              <a:t> system.</a:t>
             </a:r>
           </a:p>
         </p:txBody>
